--- a/embedded/SLAM_robot_mapping/SLAM_robot_mapping.pptx
+++ b/embedded/SLAM_robot_mapping/SLAM_robot_mapping.pptx
@@ -7,6 +7,9 @@
   <p:sldIdLst>
     <p:sldId id="256" r:id="rId2"/>
     <p:sldId id="257" r:id="rId3"/>
+    <p:sldId id="259" r:id="rId4"/>
+    <p:sldId id="260" r:id="rId5"/>
+    <p:sldId id="258" r:id="rId6"/>
   </p:sldIdLst>
   <p:sldSz cx="12192000" cy="6858000"/>
   <p:notesSz cx="6858000" cy="9144000"/>
@@ -105,6 +108,11 @@
       </a:defRPr>
     </a:lvl9pPr>
   </p:defaultTextStyle>
+  <p:extLst>
+    <p:ext uri="{EFAFB233-063F-42B5-8137-9DF3F51BA10A}">
+      <p15:sldGuideLst xmlns:p15="http://schemas.microsoft.com/office/powerpoint/2012/main"/>
+    </p:ext>
+  </p:extLst>
 </p:presentation>
 </file>
 
@@ -239,7 +247,7 @@
           <a:p>
             <a:fld id="{76DDB5C0-F327-4007-A28F-6FEF3D5ACAD3}" type="datetimeFigureOut">
               <a:rPr lang="en-US" smtClean="0"/>
-              <a:t>4/28/2026</a:t>
+              <a:t>5/5/2026</a:t>
             </a:fld>
             <a:endParaRPr lang="en-US"/>
           </a:p>
@@ -409,7 +417,7 @@
           <a:p>
             <a:fld id="{76DDB5C0-F327-4007-A28F-6FEF3D5ACAD3}" type="datetimeFigureOut">
               <a:rPr lang="en-US" smtClean="0"/>
-              <a:t>4/28/2026</a:t>
+              <a:t>5/5/2026</a:t>
             </a:fld>
             <a:endParaRPr lang="en-US"/>
           </a:p>
@@ -589,7 +597,7 @@
           <a:p>
             <a:fld id="{76DDB5C0-F327-4007-A28F-6FEF3D5ACAD3}" type="datetimeFigureOut">
               <a:rPr lang="en-US" smtClean="0"/>
-              <a:t>4/28/2026</a:t>
+              <a:t>5/5/2026</a:t>
             </a:fld>
             <a:endParaRPr lang="en-US"/>
           </a:p>
@@ -759,7 +767,7 @@
           <a:p>
             <a:fld id="{76DDB5C0-F327-4007-A28F-6FEF3D5ACAD3}" type="datetimeFigureOut">
               <a:rPr lang="en-US" smtClean="0"/>
-              <a:t>4/28/2026</a:t>
+              <a:t>5/5/2026</a:t>
             </a:fld>
             <a:endParaRPr lang="en-US"/>
           </a:p>
@@ -1005,7 +1013,7 @@
           <a:p>
             <a:fld id="{76DDB5C0-F327-4007-A28F-6FEF3D5ACAD3}" type="datetimeFigureOut">
               <a:rPr lang="en-US" smtClean="0"/>
-              <a:t>4/28/2026</a:t>
+              <a:t>5/5/2026</a:t>
             </a:fld>
             <a:endParaRPr lang="en-US"/>
           </a:p>
@@ -1237,7 +1245,7 @@
           <a:p>
             <a:fld id="{76DDB5C0-F327-4007-A28F-6FEF3D5ACAD3}" type="datetimeFigureOut">
               <a:rPr lang="en-US" smtClean="0"/>
-              <a:t>4/28/2026</a:t>
+              <a:t>5/5/2026</a:t>
             </a:fld>
             <a:endParaRPr lang="en-US"/>
           </a:p>
@@ -1604,7 +1612,7 @@
           <a:p>
             <a:fld id="{76DDB5C0-F327-4007-A28F-6FEF3D5ACAD3}" type="datetimeFigureOut">
               <a:rPr lang="en-US" smtClean="0"/>
-              <a:t>4/28/2026</a:t>
+              <a:t>5/5/2026</a:t>
             </a:fld>
             <a:endParaRPr lang="en-US"/>
           </a:p>
@@ -1722,7 +1730,7 @@
           <a:p>
             <a:fld id="{76DDB5C0-F327-4007-A28F-6FEF3D5ACAD3}" type="datetimeFigureOut">
               <a:rPr lang="en-US" smtClean="0"/>
-              <a:t>4/28/2026</a:t>
+              <a:t>5/5/2026</a:t>
             </a:fld>
             <a:endParaRPr lang="en-US"/>
           </a:p>
@@ -1817,7 +1825,7 @@
           <a:p>
             <a:fld id="{76DDB5C0-F327-4007-A28F-6FEF3D5ACAD3}" type="datetimeFigureOut">
               <a:rPr lang="en-US" smtClean="0"/>
-              <a:t>4/28/2026</a:t>
+              <a:t>5/5/2026</a:t>
             </a:fld>
             <a:endParaRPr lang="en-US"/>
           </a:p>
@@ -2094,7 +2102,7 @@
           <a:p>
             <a:fld id="{76DDB5C0-F327-4007-A28F-6FEF3D5ACAD3}" type="datetimeFigureOut">
               <a:rPr lang="en-US" smtClean="0"/>
-              <a:t>4/28/2026</a:t>
+              <a:t>5/5/2026</a:t>
             </a:fld>
             <a:endParaRPr lang="en-US"/>
           </a:p>
@@ -2347,7 +2355,7 @@
           <a:p>
             <a:fld id="{76DDB5C0-F327-4007-A28F-6FEF3D5ACAD3}" type="datetimeFigureOut">
               <a:rPr lang="en-US" smtClean="0"/>
-              <a:t>4/28/2026</a:t>
+              <a:t>5/5/2026</a:t>
             </a:fld>
             <a:endParaRPr lang="en-US"/>
           </a:p>
@@ -2560,7 +2568,7 @@
           <a:p>
             <a:fld id="{76DDB5C0-F327-4007-A28F-6FEF3D5ACAD3}" type="datetimeFigureOut">
               <a:rPr lang="en-US" smtClean="0"/>
-              <a:t>4/28/2026</a:t>
+              <a:t>5/5/2026</a:t>
             </a:fld>
             <a:endParaRPr lang="en-US"/>
           </a:p>
@@ -3086,20 +3094,11 @@
           <a:p>
             <a:r>
               <a:rPr lang="en-US" dirty="0" smtClean="0"/>
-              <a:t>*Where did I install this?? It was working somewhere…</a:t>
-            </a:r>
-          </a:p>
-          <a:p>
-            <a:pPr lvl="1"/>
-            <a:r>
-              <a:rPr lang="en-US" dirty="0" smtClean="0"/>
-              <a:t>Can’t find it…reinstall and </a:t>
-            </a:r>
-            <a:r>
-              <a:rPr lang="en-US" smtClean="0"/>
-              <a:t>try again…</a:t>
-            </a:r>
-            <a:endParaRPr lang="en-US" dirty="0"/>
+              <a:t>*I thought I installed this and had it working, but can’t find it.</a:t>
+            </a:r>
+          </a:p>
+          <a:p>
+            <a:endParaRPr lang="en-US" dirty="0" smtClean="0"/>
           </a:p>
         </p:txBody>
       </p:sp>
@@ -3107,6 +3106,477 @@
     <p:extLst>
       <p:ext uri="{BB962C8B-B14F-4D97-AF65-F5344CB8AC3E}">
         <p14:creationId xmlns:p14="http://schemas.microsoft.com/office/powerpoint/2010/main" val="17769975"/>
+      </p:ext>
+    </p:extLst>
+  </p:cSld>
+  <p:clrMapOvr>
+    <a:masterClrMapping/>
+  </p:clrMapOvr>
+</p:sld>
+</file>
+
+<file path=ppt/slides/slide3.xml><?xml version="1.0" encoding="utf-8"?>
+<p:sld xmlns:a="http://schemas.openxmlformats.org/drawingml/2006/main" xmlns:r="http://schemas.openxmlformats.org/officeDocument/2006/relationships" xmlns:p="http://schemas.openxmlformats.org/presentationml/2006/main">
+  <p:cSld>
+    <p:spTree>
+      <p:nvGrpSpPr>
+        <p:cNvPr id="1" name=""/>
+        <p:cNvGrpSpPr/>
+        <p:nvPr/>
+      </p:nvGrpSpPr>
+      <p:grpSpPr>
+        <a:xfrm>
+          <a:off x="0" y="0"/>
+          <a:ext cx="0" cy="0"/>
+          <a:chOff x="0" y="0"/>
+          <a:chExt cx="0" cy="0"/>
+        </a:xfrm>
+      </p:grpSpPr>
+      <p:sp>
+        <p:nvSpPr>
+          <p:cNvPr id="2" name="Title 1"/>
+          <p:cNvSpPr>
+            <a:spLocks noGrp="1"/>
+          </p:cNvSpPr>
+          <p:nvPr>
+            <p:ph type="title"/>
+          </p:nvPr>
+        </p:nvSpPr>
+        <p:spPr/>
+        <p:txBody>
+          <a:bodyPr/>
+          <a:lstStyle/>
+          <a:p>
+            <a:r>
+              <a:rPr lang="en-US" dirty="0" smtClean="0"/>
+              <a:t>ORB-SLAM using WSL on Windows</a:t>
+            </a:r>
+            <a:endParaRPr lang="en-US" dirty="0"/>
+          </a:p>
+        </p:txBody>
+      </p:sp>
+      <p:sp>
+        <p:nvSpPr>
+          <p:cNvPr id="3" name="Content Placeholder 2"/>
+          <p:cNvSpPr>
+            <a:spLocks noGrp="1"/>
+          </p:cNvSpPr>
+          <p:nvPr>
+            <p:ph idx="1"/>
+          </p:nvPr>
+        </p:nvSpPr>
+        <p:spPr/>
+        <p:txBody>
+          <a:bodyPr/>
+          <a:lstStyle/>
+          <a:p>
+            <a:r>
+              <a:rPr lang="en-US" dirty="0" smtClean="0"/>
+              <a:t>Must run this from WSL or real Linux</a:t>
+            </a:r>
+          </a:p>
+          <a:p>
+            <a:r>
+              <a:rPr lang="en-US" dirty="0" smtClean="0"/>
+              <a:t>Windows command line (as admin) to bind the </a:t>
+            </a:r>
+            <a:r>
+              <a:rPr lang="en-US" dirty="0" err="1" smtClean="0"/>
+              <a:t>RealSense</a:t>
+            </a:r>
+            <a:r>
+              <a:rPr lang="en-US" dirty="0" smtClean="0"/>
+              <a:t> cam first:</a:t>
+            </a:r>
+          </a:p>
+          <a:p>
+            <a:pPr lvl="1"/>
+            <a:r>
+              <a:rPr lang="en-US" dirty="0" err="1" smtClean="0"/>
+              <a:t>usbipd</a:t>
+            </a:r>
+            <a:r>
+              <a:rPr lang="en-US" dirty="0" smtClean="0"/>
+              <a:t> list  *note the </a:t>
+            </a:r>
+            <a:r>
+              <a:rPr lang="en-US" dirty="0" err="1" smtClean="0"/>
+              <a:t>busID</a:t>
+            </a:r>
+            <a:r>
+              <a:rPr lang="en-US" dirty="0" smtClean="0"/>
+              <a:t> for the </a:t>
+            </a:r>
+            <a:r>
+              <a:rPr lang="en-US" dirty="0" err="1" smtClean="0"/>
+              <a:t>RealSense</a:t>
+            </a:r>
+            <a:r>
+              <a:rPr lang="en-US" dirty="0" smtClean="0"/>
+              <a:t> cam</a:t>
+            </a:r>
+          </a:p>
+          <a:p>
+            <a:pPr lvl="1"/>
+            <a:r>
+              <a:rPr lang="en-US" dirty="0" err="1" smtClean="0"/>
+              <a:t>usbipd</a:t>
+            </a:r>
+            <a:r>
+              <a:rPr lang="en-US" dirty="0" smtClean="0"/>
+              <a:t> bind --</a:t>
+            </a:r>
+            <a:r>
+              <a:rPr lang="en-US" dirty="0" err="1" smtClean="0"/>
+              <a:t>busid</a:t>
+            </a:r>
+            <a:r>
+              <a:rPr lang="en-US" dirty="0"/>
+              <a:t> </a:t>
+            </a:r>
+            <a:r>
+              <a:rPr lang="en-US" dirty="0" smtClean="0"/>
+              <a:t>1-3</a:t>
+            </a:r>
+          </a:p>
+          <a:p>
+            <a:pPr lvl="1"/>
+            <a:r>
+              <a:rPr lang="en-US" dirty="0" err="1" smtClean="0"/>
+              <a:t>usbipd</a:t>
+            </a:r>
+            <a:r>
+              <a:rPr lang="en-US" dirty="0" smtClean="0"/>
+              <a:t> attach --</a:t>
+            </a:r>
+            <a:r>
+              <a:rPr lang="en-US" dirty="0" err="1" smtClean="0"/>
+              <a:t>wsl</a:t>
+            </a:r>
+            <a:r>
+              <a:rPr lang="en-US" dirty="0" smtClean="0"/>
+              <a:t> --</a:t>
+            </a:r>
+            <a:r>
+              <a:rPr lang="en-US" dirty="0" err="1" smtClean="0"/>
+              <a:t>busid</a:t>
+            </a:r>
+            <a:r>
+              <a:rPr lang="en-US" dirty="0" smtClean="0"/>
+              <a:t> 1-3</a:t>
+            </a:r>
+          </a:p>
+          <a:p>
+            <a:r>
+              <a:rPr lang="en-US" dirty="0" smtClean="0"/>
+              <a:t>*Getting errors:</a:t>
+            </a:r>
+          </a:p>
+          <a:p>
+            <a:pPr lvl="1"/>
+            <a:r>
+              <a:rPr lang="en-US" dirty="0" smtClean="0"/>
+              <a:t>The IMU part of the sensor is not passed thru from </a:t>
+            </a:r>
+            <a:r>
+              <a:rPr lang="en-US" dirty="0" err="1" smtClean="0"/>
+              <a:t>usbipd</a:t>
+            </a:r>
+            <a:r>
+              <a:rPr lang="en-US" dirty="0" smtClean="0"/>
+              <a:t> - *This is a known limitation of </a:t>
+            </a:r>
+            <a:r>
+              <a:rPr lang="en-US" dirty="0" err="1" smtClean="0"/>
+              <a:t>wsl</a:t>
+            </a:r>
+            <a:r>
+              <a:rPr lang="en-US" dirty="0" smtClean="0"/>
+              <a:t>!!</a:t>
+            </a:r>
+          </a:p>
+          <a:p>
+            <a:pPr lvl="1"/>
+            <a:r>
+              <a:rPr lang="en-US" dirty="0" smtClean="0"/>
+              <a:t>Also getting segmentation fault – but that is fixable, just ask Claude.</a:t>
+            </a:r>
+          </a:p>
+          <a:p>
+            <a:endParaRPr lang="en-US" dirty="0" smtClean="0"/>
+          </a:p>
+        </p:txBody>
+      </p:sp>
+    </p:spTree>
+    <p:extLst>
+      <p:ext uri="{BB962C8B-B14F-4D97-AF65-F5344CB8AC3E}">
+        <p14:creationId xmlns:p14="http://schemas.microsoft.com/office/powerpoint/2010/main" val="1391031771"/>
+      </p:ext>
+    </p:extLst>
+  </p:cSld>
+  <p:clrMapOvr>
+    <a:masterClrMapping/>
+  </p:clrMapOvr>
+</p:sld>
+</file>
+
+<file path=ppt/slides/slide4.xml><?xml version="1.0" encoding="utf-8"?>
+<p:sld xmlns:a="http://schemas.openxmlformats.org/drawingml/2006/main" xmlns:r="http://schemas.openxmlformats.org/officeDocument/2006/relationships" xmlns:p="http://schemas.openxmlformats.org/presentationml/2006/main">
+  <p:cSld>
+    <p:spTree>
+      <p:nvGrpSpPr>
+        <p:cNvPr id="1" name=""/>
+        <p:cNvGrpSpPr/>
+        <p:nvPr/>
+      </p:nvGrpSpPr>
+      <p:grpSpPr>
+        <a:xfrm>
+          <a:off x="0" y="0"/>
+          <a:ext cx="0" cy="0"/>
+          <a:chOff x="0" y="0"/>
+          <a:chExt cx="0" cy="0"/>
+        </a:xfrm>
+      </p:grpSpPr>
+      <p:sp>
+        <p:nvSpPr>
+          <p:cNvPr id="2" name="Title 1"/>
+          <p:cNvSpPr>
+            <a:spLocks noGrp="1"/>
+          </p:cNvSpPr>
+          <p:nvPr>
+            <p:ph type="title"/>
+          </p:nvPr>
+        </p:nvSpPr>
+        <p:spPr/>
+        <p:txBody>
+          <a:bodyPr/>
+          <a:lstStyle/>
+          <a:p>
+            <a:r>
+              <a:rPr lang="en-US" dirty="0" smtClean="0"/>
+              <a:t>ORB-SLAM on native Linux</a:t>
+            </a:r>
+            <a:endParaRPr lang="en-US" dirty="0"/>
+          </a:p>
+        </p:txBody>
+      </p:sp>
+      <p:sp>
+        <p:nvSpPr>
+          <p:cNvPr id="3" name="Content Placeholder 2"/>
+          <p:cNvSpPr>
+            <a:spLocks noGrp="1"/>
+          </p:cNvSpPr>
+          <p:nvPr>
+            <p:ph idx="1"/>
+          </p:nvPr>
+        </p:nvSpPr>
+        <p:spPr/>
+        <p:txBody>
+          <a:bodyPr>
+            <a:normAutofit lnSpcReduction="10000"/>
+          </a:bodyPr>
+          <a:lstStyle/>
+          <a:p>
+            <a:r>
+              <a:rPr lang="en-US" dirty="0" smtClean="0"/>
+              <a:t>This is working now on the Linux w/RTX 4060</a:t>
+            </a:r>
+          </a:p>
+          <a:p>
+            <a:pPr lvl="1"/>
+            <a:r>
+              <a:rPr lang="en-US" dirty="0" smtClean="0"/>
+              <a:t>Actually does NOT need a GPU to run, other than the display window</a:t>
+            </a:r>
+          </a:p>
+          <a:p>
+            <a:r>
+              <a:rPr lang="en-US" dirty="0" smtClean="0"/>
+              <a:t>Using the D435i:</a:t>
+            </a:r>
+          </a:p>
+          <a:p>
+            <a:pPr lvl="1"/>
+            <a:r>
+              <a:rPr lang="en-US" dirty="0" smtClean="0"/>
+              <a:t>cd ~/ORB_SLAM3</a:t>
+            </a:r>
+          </a:p>
+          <a:p>
+            <a:pPr lvl="1"/>
+            <a:r>
+              <a:rPr lang="en-US" dirty="0" smtClean="0"/>
+              <a:t>./Examples/Stereo-Inertial/stereo_inertial_realsense_D435i Vocabulary/ORBvoc.txt Examples/Stereo-Inertial/RealSense_D435i.yaml</a:t>
+            </a:r>
+            <a:r>
+              <a:rPr lang="en-US" dirty="0"/>
+              <a:t> </a:t>
+            </a:r>
+            <a:r>
+              <a:rPr lang="en-US" dirty="0" err="1" smtClean="0"/>
+              <a:t>my_trajectory</a:t>
+            </a:r>
+            <a:endParaRPr lang="en-US" dirty="0" smtClean="0"/>
+          </a:p>
+          <a:p>
+            <a:r>
+              <a:rPr lang="en-US" dirty="0" smtClean="0"/>
+              <a:t>*This will save a map as my_trajectory.txt</a:t>
+            </a:r>
+          </a:p>
+          <a:p>
+            <a:pPr lvl="1"/>
+            <a:r>
+              <a:rPr lang="en-US" dirty="0" smtClean="0"/>
+              <a:t>*ORB-SLAM will NOT save the point cloud! That requires additional code!!</a:t>
+            </a:r>
+          </a:p>
+          <a:p>
+            <a:pPr lvl="1"/>
+            <a:r>
+              <a:rPr lang="en-US" dirty="0" smtClean="0"/>
+              <a:t>This can be viewed with a separate tool like </a:t>
+            </a:r>
+            <a:r>
+              <a:rPr lang="en-US" dirty="0" err="1" smtClean="0"/>
+              <a:t>evo</a:t>
+            </a:r>
+            <a:r>
+              <a:rPr lang="en-US" dirty="0" smtClean="0"/>
+              <a:t> or Open3D or </a:t>
+            </a:r>
+            <a:r>
+              <a:rPr lang="en-US" dirty="0" err="1" smtClean="0"/>
+              <a:t>Rviz</a:t>
+            </a:r>
+            <a:endParaRPr lang="en-US" dirty="0" smtClean="0"/>
+          </a:p>
+          <a:p>
+            <a:pPr lvl="2"/>
+            <a:r>
+              <a:rPr lang="en-US" dirty="0" smtClean="0"/>
+              <a:t>pip install </a:t>
+            </a:r>
+            <a:r>
+              <a:rPr lang="en-US" dirty="0" err="1" smtClean="0"/>
+              <a:t>evo</a:t>
+            </a:r>
+            <a:endParaRPr lang="en-US" dirty="0" smtClean="0"/>
+          </a:p>
+          <a:p>
+            <a:pPr lvl="1"/>
+            <a:endParaRPr lang="en-US" dirty="0" smtClean="0"/>
+          </a:p>
+        </p:txBody>
+      </p:sp>
+    </p:spTree>
+    <p:extLst>
+      <p:ext uri="{BB962C8B-B14F-4D97-AF65-F5344CB8AC3E}">
+        <p14:creationId xmlns:p14="http://schemas.microsoft.com/office/powerpoint/2010/main" val="3509123736"/>
+      </p:ext>
+    </p:extLst>
+  </p:cSld>
+  <p:clrMapOvr>
+    <a:masterClrMapping/>
+  </p:clrMapOvr>
+</p:sld>
+</file>
+
+<file path=ppt/slides/slide5.xml><?xml version="1.0" encoding="utf-8"?>
+<p:sld xmlns:a="http://schemas.openxmlformats.org/drawingml/2006/main" xmlns:r="http://schemas.openxmlformats.org/officeDocument/2006/relationships" xmlns:p="http://schemas.openxmlformats.org/presentationml/2006/main">
+  <p:cSld>
+    <p:spTree>
+      <p:nvGrpSpPr>
+        <p:cNvPr id="1" name=""/>
+        <p:cNvGrpSpPr/>
+        <p:nvPr/>
+      </p:nvGrpSpPr>
+      <p:grpSpPr>
+        <a:xfrm>
+          <a:off x="0" y="0"/>
+          <a:ext cx="0" cy="0"/>
+          <a:chOff x="0" y="0"/>
+          <a:chExt cx="0" cy="0"/>
+        </a:xfrm>
+      </p:grpSpPr>
+      <p:sp>
+        <p:nvSpPr>
+          <p:cNvPr id="2" name="Title 1"/>
+          <p:cNvSpPr>
+            <a:spLocks noGrp="1"/>
+          </p:cNvSpPr>
+          <p:nvPr>
+            <p:ph type="title"/>
+          </p:nvPr>
+        </p:nvSpPr>
+        <p:spPr/>
+        <p:txBody>
+          <a:bodyPr/>
+          <a:lstStyle/>
+          <a:p>
+            <a:r>
+              <a:rPr lang="en-US" dirty="0" smtClean="0"/>
+              <a:t>Thermal Camera: </a:t>
+            </a:r>
+            <a:r>
+              <a:rPr lang="en-US" dirty="0" err="1" smtClean="0"/>
+              <a:t>MileSeey</a:t>
+            </a:r>
+            <a:endParaRPr lang="en-US" dirty="0"/>
+          </a:p>
+        </p:txBody>
+      </p:sp>
+      <p:sp>
+        <p:nvSpPr>
+          <p:cNvPr id="3" name="Content Placeholder 2"/>
+          <p:cNvSpPr>
+            <a:spLocks noGrp="1"/>
+          </p:cNvSpPr>
+          <p:nvPr>
+            <p:ph idx="1"/>
+          </p:nvPr>
+        </p:nvSpPr>
+        <p:spPr/>
+        <p:txBody>
+          <a:bodyPr/>
+          <a:lstStyle/>
+          <a:p>
+            <a:r>
+              <a:rPr lang="en-US" dirty="0"/>
+              <a:t>Code in \</a:t>
+            </a:r>
+            <a:r>
+              <a:rPr lang="en-US" dirty="0" smtClean="0"/>
+              <a:t>embedded\</a:t>
+            </a:r>
+            <a:r>
+              <a:rPr lang="en-US" dirty="0" err="1" smtClean="0"/>
+              <a:t>RaspberryPi</a:t>
+            </a:r>
+            <a:r>
+              <a:rPr lang="en-US" dirty="0" smtClean="0"/>
+              <a:t>\</a:t>
+            </a:r>
+            <a:r>
+              <a:rPr lang="en-US" dirty="0" err="1" smtClean="0"/>
+              <a:t>PyThermalCam</a:t>
+            </a:r>
+            <a:endParaRPr lang="en-US" dirty="0" smtClean="0"/>
+          </a:p>
+          <a:p>
+            <a:pPr lvl="1"/>
+            <a:r>
+              <a:rPr lang="en-US" dirty="0" smtClean="0"/>
+              <a:t>Code modified to turn image upside down!</a:t>
+            </a:r>
+            <a:endParaRPr lang="en-US" dirty="0"/>
+          </a:p>
+        </p:txBody>
+      </p:sp>
+    </p:spTree>
+    <p:extLst>
+      <p:ext uri="{BB962C8B-B14F-4D97-AF65-F5344CB8AC3E}">
+        <p14:creationId xmlns:p14="http://schemas.microsoft.com/office/powerpoint/2010/main" val="2400042052"/>
       </p:ext>
     </p:extLst>
   </p:cSld>

--- a/embedded/SLAM_robot_mapping/SLAM_robot_mapping.pptx
+++ b/embedded/SLAM_robot_mapping/SLAM_robot_mapping.pptx
@@ -9,7 +9,10 @@
     <p:sldId id="257" r:id="rId3"/>
     <p:sldId id="259" r:id="rId4"/>
     <p:sldId id="260" r:id="rId5"/>
-    <p:sldId id="258" r:id="rId6"/>
+    <p:sldId id="261" r:id="rId6"/>
+    <p:sldId id="262" r:id="rId7"/>
+    <p:sldId id="263" r:id="rId8"/>
+    <p:sldId id="258" r:id="rId9"/>
   </p:sldIdLst>
   <p:sldSz cx="12192000" cy="6858000"/>
   <p:notesSz cx="6858000" cy="9144000"/>
@@ -247,7 +250,7 @@
           <a:p>
             <a:fld id="{76DDB5C0-F327-4007-A28F-6FEF3D5ACAD3}" type="datetimeFigureOut">
               <a:rPr lang="en-US" smtClean="0"/>
-              <a:t>5/5/2026</a:t>
+              <a:t>5/6/2026</a:t>
             </a:fld>
             <a:endParaRPr lang="en-US"/>
           </a:p>
@@ -417,7 +420,7 @@
           <a:p>
             <a:fld id="{76DDB5C0-F327-4007-A28F-6FEF3D5ACAD3}" type="datetimeFigureOut">
               <a:rPr lang="en-US" smtClean="0"/>
-              <a:t>5/5/2026</a:t>
+              <a:t>5/6/2026</a:t>
             </a:fld>
             <a:endParaRPr lang="en-US"/>
           </a:p>
@@ -597,7 +600,7 @@
           <a:p>
             <a:fld id="{76DDB5C0-F327-4007-A28F-6FEF3D5ACAD3}" type="datetimeFigureOut">
               <a:rPr lang="en-US" smtClean="0"/>
-              <a:t>5/5/2026</a:t>
+              <a:t>5/6/2026</a:t>
             </a:fld>
             <a:endParaRPr lang="en-US"/>
           </a:p>
@@ -767,7 +770,7 @@
           <a:p>
             <a:fld id="{76DDB5C0-F327-4007-A28F-6FEF3D5ACAD3}" type="datetimeFigureOut">
               <a:rPr lang="en-US" smtClean="0"/>
-              <a:t>5/5/2026</a:t>
+              <a:t>5/6/2026</a:t>
             </a:fld>
             <a:endParaRPr lang="en-US"/>
           </a:p>
@@ -1013,7 +1016,7 @@
           <a:p>
             <a:fld id="{76DDB5C0-F327-4007-A28F-6FEF3D5ACAD3}" type="datetimeFigureOut">
               <a:rPr lang="en-US" smtClean="0"/>
-              <a:t>5/5/2026</a:t>
+              <a:t>5/6/2026</a:t>
             </a:fld>
             <a:endParaRPr lang="en-US"/>
           </a:p>
@@ -1245,7 +1248,7 @@
           <a:p>
             <a:fld id="{76DDB5C0-F327-4007-A28F-6FEF3D5ACAD3}" type="datetimeFigureOut">
               <a:rPr lang="en-US" smtClean="0"/>
-              <a:t>5/5/2026</a:t>
+              <a:t>5/6/2026</a:t>
             </a:fld>
             <a:endParaRPr lang="en-US"/>
           </a:p>
@@ -1612,7 +1615,7 @@
           <a:p>
             <a:fld id="{76DDB5C0-F327-4007-A28F-6FEF3D5ACAD3}" type="datetimeFigureOut">
               <a:rPr lang="en-US" smtClean="0"/>
-              <a:t>5/5/2026</a:t>
+              <a:t>5/6/2026</a:t>
             </a:fld>
             <a:endParaRPr lang="en-US"/>
           </a:p>
@@ -1730,7 +1733,7 @@
           <a:p>
             <a:fld id="{76DDB5C0-F327-4007-A28F-6FEF3D5ACAD3}" type="datetimeFigureOut">
               <a:rPr lang="en-US" smtClean="0"/>
-              <a:t>5/5/2026</a:t>
+              <a:t>5/6/2026</a:t>
             </a:fld>
             <a:endParaRPr lang="en-US"/>
           </a:p>
@@ -1825,7 +1828,7 @@
           <a:p>
             <a:fld id="{76DDB5C0-F327-4007-A28F-6FEF3D5ACAD3}" type="datetimeFigureOut">
               <a:rPr lang="en-US" smtClean="0"/>
-              <a:t>5/5/2026</a:t>
+              <a:t>5/6/2026</a:t>
             </a:fld>
             <a:endParaRPr lang="en-US"/>
           </a:p>
@@ -2102,7 +2105,7 @@
           <a:p>
             <a:fld id="{76DDB5C0-F327-4007-A28F-6FEF3D5ACAD3}" type="datetimeFigureOut">
               <a:rPr lang="en-US" smtClean="0"/>
-              <a:t>5/5/2026</a:t>
+              <a:t>5/6/2026</a:t>
             </a:fld>
             <a:endParaRPr lang="en-US"/>
           </a:p>
@@ -2355,7 +2358,7 @@
           <a:p>
             <a:fld id="{76DDB5C0-F327-4007-A28F-6FEF3D5ACAD3}" type="datetimeFigureOut">
               <a:rPr lang="en-US" smtClean="0"/>
-              <a:t>5/5/2026</a:t>
+              <a:t>5/6/2026</a:t>
             </a:fld>
             <a:endParaRPr lang="en-US"/>
           </a:p>
@@ -2568,7 +2571,7 @@
           <a:p>
             <a:fld id="{76DDB5C0-F327-4007-A28F-6FEF3D5ACAD3}" type="datetimeFigureOut">
               <a:rPr lang="en-US" smtClean="0"/>
-              <a:t>5/5/2026</a:t>
+              <a:t>5/6/2026</a:t>
             </a:fld>
             <a:endParaRPr lang="en-US"/>
           </a:p>
@@ -3428,8 +3431,20 @@
             <a:pPr lvl="1"/>
             <a:r>
               <a:rPr lang="en-US" dirty="0" smtClean="0"/>
-              <a:t>*ORB-SLAM will NOT save the point cloud! That requires additional code!!</a:t>
-            </a:r>
+              <a:t>*ORB-SLAM will NOT save the point cloud! That requires additional code</a:t>
+            </a:r>
+            <a:r>
+              <a:rPr lang="en-US" dirty="0" smtClean="0"/>
+              <a:t>!!</a:t>
+            </a:r>
+          </a:p>
+          <a:p>
+            <a:pPr lvl="2"/>
+            <a:r>
+              <a:rPr lang="en-US" dirty="0" smtClean="0"/>
+              <a:t>Does this make it pointless? Or can the code be integrated into my own app?</a:t>
+            </a:r>
+            <a:endParaRPr lang="en-US" dirty="0" smtClean="0"/>
           </a:p>
           <a:p>
             <a:pPr lvl="1"/>
@@ -3483,6 +3498,780 @@
 </file>
 
 <file path=ppt/slides/slide5.xml><?xml version="1.0" encoding="utf-8"?>
+<p:sld xmlns:a="http://schemas.openxmlformats.org/drawingml/2006/main" xmlns:r="http://schemas.openxmlformats.org/officeDocument/2006/relationships" xmlns:p="http://schemas.openxmlformats.org/presentationml/2006/main">
+  <p:cSld>
+    <p:spTree>
+      <p:nvGrpSpPr>
+        <p:cNvPr id="1" name=""/>
+        <p:cNvGrpSpPr/>
+        <p:nvPr/>
+      </p:nvGrpSpPr>
+      <p:grpSpPr>
+        <a:xfrm>
+          <a:off x="0" y="0"/>
+          <a:ext cx="0" cy="0"/>
+          <a:chOff x="0" y="0"/>
+          <a:chExt cx="0" cy="0"/>
+        </a:xfrm>
+      </p:grpSpPr>
+      <p:sp>
+        <p:nvSpPr>
+          <p:cNvPr id="2" name="Title 1"/>
+          <p:cNvSpPr>
+            <a:spLocks noGrp="1"/>
+          </p:cNvSpPr>
+          <p:nvPr>
+            <p:ph type="title"/>
+          </p:nvPr>
+        </p:nvSpPr>
+        <p:spPr/>
+        <p:txBody>
+          <a:bodyPr/>
+          <a:lstStyle/>
+          <a:p>
+            <a:r>
+              <a:rPr lang="en-US" dirty="0" smtClean="0"/>
+              <a:t>ORB-SLAM on Raspberry Pi 5? Orin </a:t>
+            </a:r>
+            <a:r>
+              <a:rPr lang="en-US" dirty="0" err="1" smtClean="0"/>
+              <a:t>Nano</a:t>
+            </a:r>
+            <a:r>
+              <a:rPr lang="en-US" dirty="0" smtClean="0"/>
+              <a:t>?</a:t>
+            </a:r>
+            <a:endParaRPr lang="en-US" dirty="0"/>
+          </a:p>
+        </p:txBody>
+      </p:sp>
+      <p:sp>
+        <p:nvSpPr>
+          <p:cNvPr id="3" name="Content Placeholder 2"/>
+          <p:cNvSpPr>
+            <a:spLocks noGrp="1"/>
+          </p:cNvSpPr>
+          <p:nvPr>
+            <p:ph idx="1"/>
+          </p:nvPr>
+        </p:nvSpPr>
+        <p:spPr/>
+        <p:txBody>
+          <a:bodyPr>
+            <a:normAutofit fontScale="92500" lnSpcReduction="20000"/>
+          </a:bodyPr>
+          <a:lstStyle/>
+          <a:p>
+            <a:r>
+              <a:rPr lang="en-US" dirty="0" smtClean="0"/>
+              <a:t>On </a:t>
+            </a:r>
+            <a:r>
+              <a:rPr lang="en-US" dirty="0" err="1" smtClean="0"/>
+              <a:t>Nvidia</a:t>
+            </a:r>
+            <a:r>
+              <a:rPr lang="en-US" dirty="0" smtClean="0"/>
+              <a:t> </a:t>
+            </a:r>
+            <a:r>
+              <a:rPr lang="en-US" dirty="0" err="1" smtClean="0"/>
+              <a:t>Jetson</a:t>
+            </a:r>
+            <a:r>
+              <a:rPr lang="en-US" dirty="0" smtClean="0"/>
+              <a:t> Orin </a:t>
+            </a:r>
+            <a:r>
+              <a:rPr lang="en-US" dirty="0" err="1" smtClean="0"/>
+              <a:t>Nano</a:t>
+            </a:r>
+            <a:r>
+              <a:rPr lang="en-US" dirty="0" smtClean="0"/>
+              <a:t>:</a:t>
+            </a:r>
+          </a:p>
+          <a:p>
+            <a:pPr lvl="1"/>
+            <a:r>
+              <a:rPr lang="en-US" dirty="0" smtClean="0"/>
+              <a:t>Yes, at full performance!</a:t>
+            </a:r>
+          </a:p>
+          <a:p>
+            <a:pPr lvl="1"/>
+            <a:r>
+              <a:rPr lang="en-US" dirty="0" smtClean="0"/>
+              <a:t>Has USB 3.2 ports</a:t>
+            </a:r>
+          </a:p>
+          <a:p>
+            <a:pPr lvl="1"/>
+            <a:r>
+              <a:rPr lang="en-US" dirty="0" smtClean="0"/>
+              <a:t>Jetpack ships with </a:t>
+            </a:r>
+            <a:r>
+              <a:rPr lang="en-US" dirty="0" err="1" smtClean="0"/>
+              <a:t>OpenCV</a:t>
+            </a:r>
+            <a:r>
+              <a:rPr lang="en-US" dirty="0" smtClean="0"/>
+              <a:t> 4.x already – check version, though</a:t>
+            </a:r>
+          </a:p>
+          <a:p>
+            <a:pPr lvl="1"/>
+            <a:r>
+              <a:rPr lang="en-US" dirty="0" smtClean="0"/>
+              <a:t>Pangolin viewer works fine with the </a:t>
+            </a:r>
+            <a:r>
+              <a:rPr lang="en-US" dirty="0" err="1" smtClean="0"/>
+              <a:t>Nano</a:t>
+            </a:r>
+            <a:r>
+              <a:rPr lang="en-US" dirty="0" smtClean="0"/>
+              <a:t> GPU</a:t>
+            </a:r>
+          </a:p>
+          <a:p>
+            <a:pPr lvl="1"/>
+            <a:r>
+              <a:rPr lang="en-US" dirty="0" smtClean="0"/>
+              <a:t>Another option: Isaac ROS Visual SLAM – optimized for </a:t>
+            </a:r>
+            <a:r>
+              <a:rPr lang="en-US" dirty="0" err="1" smtClean="0"/>
+              <a:t>Nvidia</a:t>
+            </a:r>
+            <a:r>
+              <a:rPr lang="en-US" dirty="0" smtClean="0"/>
+              <a:t> </a:t>
+            </a:r>
+            <a:r>
+              <a:rPr lang="en-US" dirty="0" err="1" smtClean="0"/>
+              <a:t>Nano</a:t>
+            </a:r>
+            <a:endParaRPr lang="en-US" dirty="0" smtClean="0"/>
+          </a:p>
+          <a:p>
+            <a:r>
+              <a:rPr lang="en-US" dirty="0" smtClean="0"/>
+              <a:t>Pi 5:</a:t>
+            </a:r>
+          </a:p>
+          <a:p>
+            <a:pPr lvl="1"/>
+            <a:r>
+              <a:rPr lang="en-US" dirty="0" smtClean="0"/>
+              <a:t>Yes, but you will only get 10-20fps performance</a:t>
+            </a:r>
+          </a:p>
+          <a:p>
+            <a:pPr lvl="1"/>
+            <a:r>
+              <a:rPr lang="en-US" dirty="0" smtClean="0"/>
+              <a:t>Things that will help performance:</a:t>
+            </a:r>
+          </a:p>
+          <a:p>
+            <a:pPr lvl="2"/>
+            <a:r>
+              <a:rPr lang="en-US" dirty="0" smtClean="0"/>
+              <a:t>Disable the viewer</a:t>
+            </a:r>
+          </a:p>
+          <a:p>
+            <a:pPr lvl="2"/>
+            <a:r>
+              <a:rPr lang="en-US" dirty="0" smtClean="0"/>
+              <a:t>Use fast SSD card</a:t>
+            </a:r>
+          </a:p>
+          <a:p>
+            <a:pPr lvl="2"/>
+            <a:r>
+              <a:rPr lang="en-US" dirty="0" smtClean="0"/>
+              <a:t>Adequate cooling</a:t>
+            </a:r>
+          </a:p>
+          <a:p>
+            <a:pPr lvl="1"/>
+            <a:r>
+              <a:rPr lang="en-US" dirty="0" smtClean="0"/>
+              <a:t>Pi 5 has USB 3.0 – will work, but maybe slower?</a:t>
+            </a:r>
+            <a:endParaRPr lang="en-US" dirty="0"/>
+          </a:p>
+        </p:txBody>
+      </p:sp>
+    </p:spTree>
+    <p:extLst>
+      <p:ext uri="{BB962C8B-B14F-4D97-AF65-F5344CB8AC3E}">
+        <p14:creationId xmlns:p14="http://schemas.microsoft.com/office/powerpoint/2010/main" val="3396216411"/>
+      </p:ext>
+    </p:extLst>
+  </p:cSld>
+  <p:clrMapOvr>
+    <a:masterClrMapping/>
+  </p:clrMapOvr>
+</p:sld>
+</file>
+
+<file path=ppt/slides/slide6.xml><?xml version="1.0" encoding="utf-8"?>
+<p:sld xmlns:a="http://schemas.openxmlformats.org/drawingml/2006/main" xmlns:r="http://schemas.openxmlformats.org/officeDocument/2006/relationships" xmlns:p="http://schemas.openxmlformats.org/presentationml/2006/main">
+  <p:cSld>
+    <p:spTree>
+      <p:nvGrpSpPr>
+        <p:cNvPr id="1" name=""/>
+        <p:cNvGrpSpPr/>
+        <p:nvPr/>
+      </p:nvGrpSpPr>
+      <p:grpSpPr>
+        <a:xfrm>
+          <a:off x="0" y="0"/>
+          <a:ext cx="0" cy="0"/>
+          <a:chOff x="0" y="0"/>
+          <a:chExt cx="0" cy="0"/>
+        </a:xfrm>
+      </p:grpSpPr>
+      <p:sp>
+        <p:nvSpPr>
+          <p:cNvPr id="2" name="Title 1"/>
+          <p:cNvSpPr>
+            <a:spLocks noGrp="1"/>
+          </p:cNvSpPr>
+          <p:nvPr>
+            <p:ph type="title"/>
+          </p:nvPr>
+        </p:nvSpPr>
+        <p:spPr/>
+        <p:txBody>
+          <a:bodyPr/>
+          <a:lstStyle/>
+          <a:p>
+            <a:r>
+              <a:rPr lang="en-US" dirty="0" err="1" smtClean="0"/>
+              <a:t>rtabmap</a:t>
+            </a:r>
+            <a:endParaRPr lang="en-US" dirty="0"/>
+          </a:p>
+        </p:txBody>
+      </p:sp>
+      <p:sp>
+        <p:nvSpPr>
+          <p:cNvPr id="3" name="Content Placeholder 2"/>
+          <p:cNvSpPr>
+            <a:spLocks noGrp="1"/>
+          </p:cNvSpPr>
+          <p:nvPr>
+            <p:ph idx="1"/>
+          </p:nvPr>
+        </p:nvSpPr>
+        <p:spPr/>
+        <p:txBody>
+          <a:bodyPr/>
+          <a:lstStyle/>
+          <a:p>
+            <a:r>
+              <a:rPr lang="en-US" dirty="0" smtClean="0"/>
+              <a:t>github.com/</a:t>
+            </a:r>
+            <a:r>
+              <a:rPr lang="en-US" dirty="0" err="1" smtClean="0"/>
+              <a:t>introlab</a:t>
+            </a:r>
+            <a:r>
+              <a:rPr lang="en-US" dirty="0" smtClean="0"/>
+              <a:t>/</a:t>
+            </a:r>
+            <a:r>
+              <a:rPr lang="en-US" dirty="0" err="1" smtClean="0"/>
+              <a:t>rtabmap</a:t>
+            </a:r>
+            <a:endParaRPr lang="en-US" dirty="0" smtClean="0"/>
+          </a:p>
+          <a:p>
+            <a:r>
+              <a:rPr lang="en-US" dirty="0" smtClean="0"/>
+              <a:t>Working on the Linux RTX4060 computer:</a:t>
+            </a:r>
+          </a:p>
+          <a:p>
+            <a:pPr lvl="1"/>
+            <a:r>
+              <a:rPr lang="en-US" dirty="0" smtClean="0"/>
+              <a:t>Just run </a:t>
+            </a:r>
+            <a:r>
+              <a:rPr lang="en-US" dirty="0" err="1" smtClean="0"/>
+              <a:t>rtabmap</a:t>
+            </a:r>
+            <a:r>
+              <a:rPr lang="en-US" dirty="0" smtClean="0"/>
+              <a:t> from anywhere</a:t>
+            </a:r>
+          </a:p>
+          <a:p>
+            <a:pPr lvl="2"/>
+            <a:r>
+              <a:rPr lang="en-US" dirty="0" smtClean="0"/>
+              <a:t>Need to select the RGBD camera D400 series first!</a:t>
+            </a:r>
+          </a:p>
+          <a:p>
+            <a:pPr lvl="2"/>
+            <a:r>
+              <a:rPr lang="en-US" dirty="0" smtClean="0"/>
+              <a:t>Then select New Database</a:t>
+            </a:r>
+          </a:p>
+          <a:p>
+            <a:pPr lvl="2"/>
+            <a:r>
+              <a:rPr lang="en-US" dirty="0" smtClean="0"/>
+              <a:t>Then select Play button</a:t>
+            </a:r>
+            <a:endParaRPr lang="en-US" dirty="0"/>
+          </a:p>
+          <a:p>
+            <a:pPr lvl="2"/>
+            <a:r>
+              <a:rPr lang="en-US" dirty="0" smtClean="0"/>
+              <a:t>it’s installed in /</a:t>
+            </a:r>
+            <a:r>
+              <a:rPr lang="en-US" dirty="0" err="1" smtClean="0"/>
+              <a:t>usr</a:t>
+            </a:r>
+            <a:r>
+              <a:rPr lang="en-US" dirty="0" smtClean="0"/>
+              <a:t>/local/bin/</a:t>
+            </a:r>
+            <a:r>
+              <a:rPr lang="en-US" dirty="0" err="1" smtClean="0"/>
+              <a:t>rtabmap</a:t>
+            </a:r>
+            <a:r>
+              <a:rPr lang="en-US" dirty="0" smtClean="0"/>
+              <a:t> but built from source in /home/big/</a:t>
+            </a:r>
+            <a:r>
+              <a:rPr lang="en-US" dirty="0" err="1" smtClean="0"/>
+              <a:t>rtabmap</a:t>
+            </a:r>
+            <a:endParaRPr lang="en-US" dirty="0"/>
+          </a:p>
+          <a:p>
+            <a:r>
+              <a:rPr lang="en-US" dirty="0" err="1" smtClean="0"/>
+              <a:t>rtabmap</a:t>
+            </a:r>
+            <a:r>
+              <a:rPr lang="en-US" dirty="0" smtClean="0"/>
+              <a:t> allows exporting 3D clouds in ply, </a:t>
+            </a:r>
+            <a:r>
+              <a:rPr lang="en-US" dirty="0" err="1" smtClean="0"/>
+              <a:t>pcd</a:t>
+            </a:r>
+            <a:r>
+              <a:rPr lang="en-US" dirty="0" smtClean="0"/>
+              <a:t>, and </a:t>
+            </a:r>
+            <a:r>
+              <a:rPr lang="en-US" dirty="0" err="1" smtClean="0"/>
+              <a:t>obj</a:t>
+            </a:r>
+            <a:r>
+              <a:rPr lang="en-US" dirty="0" smtClean="0"/>
+              <a:t> formats</a:t>
+            </a:r>
+          </a:p>
+          <a:p>
+            <a:pPr lvl="1"/>
+            <a:r>
+              <a:rPr lang="en-US" dirty="0" smtClean="0"/>
+              <a:t>Also allows export of poses</a:t>
+            </a:r>
+            <a:endParaRPr lang="en-US" dirty="0"/>
+          </a:p>
+        </p:txBody>
+      </p:sp>
+    </p:spTree>
+    <p:extLst>
+      <p:ext uri="{BB962C8B-B14F-4D97-AF65-F5344CB8AC3E}">
+        <p14:creationId xmlns:p14="http://schemas.microsoft.com/office/powerpoint/2010/main" val="2334933256"/>
+      </p:ext>
+    </p:extLst>
+  </p:cSld>
+  <p:clrMapOvr>
+    <a:masterClrMapping/>
+  </p:clrMapOvr>
+</p:sld>
+</file>
+
+<file path=ppt/slides/slide7.xml><?xml version="1.0" encoding="utf-8"?>
+<p:sld xmlns:a="http://schemas.openxmlformats.org/drawingml/2006/main" xmlns:r="http://schemas.openxmlformats.org/officeDocument/2006/relationships" xmlns:p="http://schemas.openxmlformats.org/presentationml/2006/main">
+  <p:cSld>
+    <p:spTree>
+      <p:nvGrpSpPr>
+        <p:cNvPr id="1" name=""/>
+        <p:cNvGrpSpPr/>
+        <p:nvPr/>
+      </p:nvGrpSpPr>
+      <p:grpSpPr>
+        <a:xfrm>
+          <a:off x="0" y="0"/>
+          <a:ext cx="0" cy="0"/>
+          <a:chOff x="0" y="0"/>
+          <a:chExt cx="0" cy="0"/>
+        </a:xfrm>
+      </p:grpSpPr>
+      <p:sp>
+        <p:nvSpPr>
+          <p:cNvPr id="2" name="Title 1"/>
+          <p:cNvSpPr>
+            <a:spLocks noGrp="1"/>
+          </p:cNvSpPr>
+          <p:nvPr>
+            <p:ph type="title"/>
+          </p:nvPr>
+        </p:nvSpPr>
+        <p:spPr/>
+        <p:txBody>
+          <a:bodyPr/>
+          <a:lstStyle/>
+          <a:p>
+            <a:r>
+              <a:rPr lang="en-US" dirty="0" smtClean="0"/>
+              <a:t>3D point cloud formats</a:t>
+            </a:r>
+            <a:endParaRPr lang="en-US" dirty="0"/>
+          </a:p>
+        </p:txBody>
+      </p:sp>
+      <p:graphicFrame>
+        <p:nvGraphicFramePr>
+          <p:cNvPr id="4" name="Content Placeholder 3"/>
+          <p:cNvGraphicFramePr>
+            <a:graphicFrameLocks noGrp="1"/>
+          </p:cNvGraphicFramePr>
+          <p:nvPr>
+            <p:ph idx="1"/>
+            <p:extLst>
+              <p:ext uri="{D42A27DB-BD31-4B8C-83A1-F6EECF244321}">
+                <p14:modId xmlns:p14="http://schemas.microsoft.com/office/powerpoint/2010/main" val="3990304864"/>
+              </p:ext>
+            </p:extLst>
+          </p:nvPr>
+        </p:nvGraphicFramePr>
+        <p:xfrm>
+          <a:off x="838200" y="1825625"/>
+          <a:ext cx="10515600" cy="3388360"/>
+        </p:xfrm>
+        <a:graphic>
+          <a:graphicData uri="http://schemas.openxmlformats.org/drawingml/2006/table">
+            <a:tbl>
+              <a:tblPr firstRow="1" bandRow="1">
+                <a:tableStyleId>{5C22544A-7EE6-4342-B048-85BDC9FD1C3A}</a:tableStyleId>
+              </a:tblPr>
+              <a:tblGrid>
+                <a:gridCol w="964721"/>
+                <a:gridCol w="4293079"/>
+                <a:gridCol w="2628900"/>
+                <a:gridCol w="2628900"/>
+              </a:tblGrid>
+              <a:tr h="370840">
+                <a:tc>
+                  <a:txBody>
+                    <a:bodyPr/>
+                    <a:lstStyle/>
+                    <a:p>
+                      <a:r>
+                        <a:rPr lang="en-US" dirty="0" smtClean="0"/>
+                        <a:t>Format</a:t>
+                      </a:r>
+                      <a:endParaRPr lang="en-US" dirty="0"/>
+                    </a:p>
+                  </a:txBody>
+                  <a:tcPr/>
+                </a:tc>
+                <a:tc>
+                  <a:txBody>
+                    <a:bodyPr/>
+                    <a:lstStyle/>
+                    <a:p>
+                      <a:r>
+                        <a:rPr lang="en-US" dirty="0" smtClean="0"/>
+                        <a:t>Full Name</a:t>
+                      </a:r>
+                      <a:endParaRPr lang="en-US" dirty="0"/>
+                    </a:p>
+                  </a:txBody>
+                  <a:tcPr/>
+                </a:tc>
+                <a:tc>
+                  <a:txBody>
+                    <a:bodyPr/>
+                    <a:lstStyle/>
+                    <a:p>
+                      <a:r>
+                        <a:rPr lang="en-US" dirty="0" smtClean="0"/>
+                        <a:t>Type</a:t>
+                      </a:r>
+                      <a:endParaRPr lang="en-US" dirty="0"/>
+                    </a:p>
+                  </a:txBody>
+                  <a:tcPr/>
+                </a:tc>
+                <a:tc>
+                  <a:txBody>
+                    <a:bodyPr/>
+                    <a:lstStyle/>
+                    <a:p>
+                      <a:r>
+                        <a:rPr lang="en-US" dirty="0" smtClean="0"/>
+                        <a:t>Best For</a:t>
+                      </a:r>
+                      <a:endParaRPr lang="en-US" dirty="0"/>
+                    </a:p>
+                  </a:txBody>
+                  <a:tcPr/>
+                </a:tc>
+              </a:tr>
+              <a:tr h="370840">
+                <a:tc>
+                  <a:txBody>
+                    <a:bodyPr/>
+                    <a:lstStyle/>
+                    <a:p>
+                      <a:r>
+                        <a:rPr lang="en-US" dirty="0" smtClean="0"/>
+                        <a:t>.ply</a:t>
+                      </a:r>
+                      <a:endParaRPr lang="en-US" dirty="0"/>
+                    </a:p>
+                  </a:txBody>
+                  <a:tcPr/>
+                </a:tc>
+                <a:tc>
+                  <a:txBody>
+                    <a:bodyPr/>
+                    <a:lstStyle/>
+                    <a:p>
+                      <a:r>
+                        <a:rPr lang="en-US" dirty="0" smtClean="0"/>
+                        <a:t>Polygon File Format</a:t>
+                      </a:r>
+                      <a:endParaRPr lang="en-US" dirty="0"/>
+                    </a:p>
+                  </a:txBody>
+                  <a:tcPr/>
+                </a:tc>
+                <a:tc>
+                  <a:txBody>
+                    <a:bodyPr/>
+                    <a:lstStyle/>
+                    <a:p>
+                      <a:r>
+                        <a:rPr lang="en-US" dirty="0" smtClean="0"/>
+                        <a:t>Points + optional mesh, color, normal</a:t>
+                      </a:r>
+                      <a:endParaRPr lang="en-US" dirty="0"/>
+                    </a:p>
+                  </a:txBody>
+                  <a:tcPr/>
+                </a:tc>
+                <a:tc>
+                  <a:txBody>
+                    <a:bodyPr/>
+                    <a:lstStyle/>
+                    <a:p>
+                      <a:r>
+                        <a:rPr lang="en-US" dirty="0" smtClean="0"/>
+                        <a:t>Widest</a:t>
+                      </a:r>
+                      <a:r>
+                        <a:rPr lang="en-US" baseline="0" dirty="0" smtClean="0"/>
+                        <a:t> compatibility: works in </a:t>
+                      </a:r>
+                      <a:r>
+                        <a:rPr lang="en-US" baseline="0" dirty="0" err="1" smtClean="0"/>
+                        <a:t>MeshLab</a:t>
+                      </a:r>
+                      <a:r>
+                        <a:rPr lang="en-US" baseline="0" dirty="0" smtClean="0"/>
+                        <a:t>, Blender, </a:t>
+                      </a:r>
+                      <a:r>
+                        <a:rPr lang="en-US" baseline="0" dirty="0" err="1" smtClean="0"/>
+                        <a:t>CloudCompare</a:t>
+                      </a:r>
+                      <a:r>
+                        <a:rPr lang="en-US" baseline="0" dirty="0" smtClean="0"/>
+                        <a:t>, Open3D</a:t>
+                      </a:r>
+                    </a:p>
+                  </a:txBody>
+                  <a:tcPr/>
+                </a:tc>
+              </a:tr>
+              <a:tr h="370840">
+                <a:tc>
+                  <a:txBody>
+                    <a:bodyPr/>
+                    <a:lstStyle/>
+                    <a:p>
+                      <a:r>
+                        <a:rPr lang="en-US" dirty="0" smtClean="0"/>
+                        <a:t>.</a:t>
+                      </a:r>
+                      <a:r>
+                        <a:rPr lang="en-US" dirty="0" err="1" smtClean="0"/>
+                        <a:t>pcd</a:t>
+                      </a:r>
+                      <a:endParaRPr lang="en-US" dirty="0"/>
+                    </a:p>
+                  </a:txBody>
+                  <a:tcPr/>
+                </a:tc>
+                <a:tc>
+                  <a:txBody>
+                    <a:bodyPr/>
+                    <a:lstStyle/>
+                    <a:p>
+                      <a:r>
+                        <a:rPr lang="en-US" dirty="0" smtClean="0"/>
+                        <a:t>Points Cloud Data</a:t>
+                      </a:r>
+                      <a:endParaRPr lang="en-US" dirty="0"/>
+                    </a:p>
+                  </a:txBody>
+                  <a:tcPr/>
+                </a:tc>
+                <a:tc>
+                  <a:txBody>
+                    <a:bodyPr/>
+                    <a:lstStyle/>
+                    <a:p>
+                      <a:r>
+                        <a:rPr lang="en-US" dirty="0" smtClean="0"/>
+                        <a:t>Points only, binary or ASCII</a:t>
+                      </a:r>
+                      <a:endParaRPr lang="en-US" dirty="0"/>
+                    </a:p>
+                  </a:txBody>
+                  <a:tcPr/>
+                </a:tc>
+                <a:tc>
+                  <a:txBody>
+                    <a:bodyPr/>
+                    <a:lstStyle/>
+                    <a:p>
+                      <a:r>
+                        <a:rPr lang="en-US" dirty="0" smtClean="0"/>
+                        <a:t>ROS ecosystem and</a:t>
+                      </a:r>
+                      <a:r>
+                        <a:rPr lang="en-US" baseline="0" dirty="0" smtClean="0"/>
+                        <a:t> PCL tools</a:t>
+                      </a:r>
+                      <a:endParaRPr lang="en-US" dirty="0"/>
+                    </a:p>
+                  </a:txBody>
+                  <a:tcPr/>
+                </a:tc>
+              </a:tr>
+              <a:tr h="370840">
+                <a:tc>
+                  <a:txBody>
+                    <a:bodyPr/>
+                    <a:lstStyle/>
+                    <a:p>
+                      <a:r>
+                        <a:rPr lang="en-US" dirty="0" smtClean="0"/>
+                        <a:t>.</a:t>
+                      </a:r>
+                      <a:r>
+                        <a:rPr lang="en-US" dirty="0" err="1" smtClean="0"/>
+                        <a:t>obj</a:t>
+                      </a:r>
+                      <a:endParaRPr lang="en-US" dirty="0"/>
+                    </a:p>
+                  </a:txBody>
+                  <a:tcPr/>
+                </a:tc>
+                <a:tc>
+                  <a:txBody>
+                    <a:bodyPr/>
+                    <a:lstStyle/>
+                    <a:p>
+                      <a:r>
+                        <a:rPr lang="en-US" dirty="0" err="1" smtClean="0"/>
+                        <a:t>Wavefront</a:t>
+                      </a:r>
+                      <a:r>
+                        <a:rPr lang="en-US" dirty="0" smtClean="0"/>
+                        <a:t> OBJ</a:t>
+                      </a:r>
+                      <a:endParaRPr lang="en-US" dirty="0"/>
+                    </a:p>
+                  </a:txBody>
+                  <a:tcPr/>
+                </a:tc>
+                <a:tc>
+                  <a:txBody>
+                    <a:bodyPr/>
+                    <a:lstStyle/>
+                    <a:p>
+                      <a:r>
+                        <a:rPr lang="en-US" dirty="0" smtClean="0"/>
+                        <a:t>Mesh/triangles + texture</a:t>
+                      </a:r>
+                      <a:endParaRPr lang="en-US" dirty="0"/>
+                    </a:p>
+                  </a:txBody>
+                  <a:tcPr/>
+                </a:tc>
+                <a:tc>
+                  <a:txBody>
+                    <a:bodyPr/>
+                    <a:lstStyle/>
+                    <a:p>
+                      <a:r>
+                        <a:rPr lang="en-US" dirty="0" smtClean="0"/>
+                        <a:t>3D modeling and rendering – Blender, Unity, Unreal</a:t>
+                      </a:r>
+                      <a:r>
+                        <a:rPr lang="en-US" baseline="0" dirty="0" smtClean="0"/>
+                        <a:t> (game engines)</a:t>
+                      </a:r>
+                      <a:endParaRPr lang="en-US" dirty="0"/>
+                    </a:p>
+                  </a:txBody>
+                  <a:tcPr/>
+                </a:tc>
+              </a:tr>
+            </a:tbl>
+          </a:graphicData>
+        </a:graphic>
+      </p:graphicFrame>
+    </p:spTree>
+    <p:extLst>
+      <p:ext uri="{BB962C8B-B14F-4D97-AF65-F5344CB8AC3E}">
+        <p14:creationId xmlns:p14="http://schemas.microsoft.com/office/powerpoint/2010/main" val="2335356945"/>
+      </p:ext>
+    </p:extLst>
+  </p:cSld>
+  <p:clrMapOvr>
+    <a:masterClrMapping/>
+  </p:clrMapOvr>
+</p:sld>
+</file>
+
+<file path=ppt/slides/slide8.xml><?xml version="1.0" encoding="utf-8"?>
 <p:sld xmlns:a="http://schemas.openxmlformats.org/drawingml/2006/main" xmlns:r="http://schemas.openxmlformats.org/officeDocument/2006/relationships" xmlns:p="http://schemas.openxmlformats.org/presentationml/2006/main">
   <p:cSld>
     <p:spTree>
